--- a/PRESENTAZIONI/LLM PER SO(RisultatiFinaliEs5).pptx
+++ b/PRESENTAZIONI/LLM PER SO(RisultatiFinaliEs5).pptx
@@ -143,7 +143,7 @@
 <file path=ppt/revisionInfo.xml><?xml version="1.0" encoding="utf-8"?>
 <p1510:revInfo xmlns:a="http://schemas.openxmlformats.org/drawingml/2006/main" xmlns:r="http://schemas.openxmlformats.org/officeDocument/2006/relationships" xmlns:p1510="http://schemas.microsoft.com/office/powerpoint/2015/10/main">
   <p1510:revLst>
-    <p1510:client id="{03E91B2F-108A-48B1-9756-04213324244C}" v="85" dt="2026-04-22T14:08:02.372"/>
+    <p1510:client id="{68BF1A18-5239-4C19-82FB-168701B02558}" v="2" dt="2026-04-24T13:19:25.560"/>
   </p1510:revLst>
 </p1510:revInfo>
 </file>
@@ -153,7 +153,7 @@
   <pc:docChgLst>
     <pc:chgData name="Andrea Esposito" userId="af663d4e0f6c8da9" providerId="LiveId" clId="{262502FB-FC54-43DB-AB78-73175A28E98A}"/>
     <pc:docChg chg="undo redo custSel addSld delSld modSld sldOrd">
-      <pc:chgData name="Andrea Esposito" userId="af663d4e0f6c8da9" providerId="LiveId" clId="{262502FB-FC54-43DB-AB78-73175A28E98A}" dt="2026-04-22T14:09:41.579" v="12564" actId="20577"/>
+      <pc:chgData name="Andrea Esposito" userId="af663d4e0f6c8da9" providerId="LiveId" clId="{262502FB-FC54-43DB-AB78-73175A28E98A}" dt="2026-04-24T13:19:25.558" v="12567" actId="14826"/>
       <pc:docMkLst>
         <pc:docMk/>
       </pc:docMkLst>
@@ -219,7 +219,7 @@
         </pc:picChg>
       </pc:sldChg>
       <pc:sldChg chg="modSp mod">
-        <pc:chgData name="Andrea Esposito" userId="af663d4e0f6c8da9" providerId="LiveId" clId="{262502FB-FC54-43DB-AB78-73175A28E98A}" dt="2026-04-22T10:45:08.350" v="11219" actId="14826"/>
+        <pc:chgData name="Andrea Esposito" userId="af663d4e0f6c8da9" providerId="LiveId" clId="{262502FB-FC54-43DB-AB78-73175A28E98A}" dt="2026-04-24T13:19:25.558" v="12567" actId="14826"/>
         <pc:sldMkLst>
           <pc:docMk/>
           <pc:sldMk cId="440999752" sldId="279"/>
@@ -233,7 +233,7 @@
           </ac:spMkLst>
         </pc:spChg>
         <pc:picChg chg="mod">
-          <ac:chgData name="Andrea Esposito" userId="af663d4e0f6c8da9" providerId="LiveId" clId="{262502FB-FC54-43DB-AB78-73175A28E98A}" dt="2026-04-22T10:45:08.350" v="11219" actId="14826"/>
+          <ac:chgData name="Andrea Esposito" userId="af663d4e0f6c8da9" providerId="LiveId" clId="{262502FB-FC54-43DB-AB78-73175A28E98A}" dt="2026-04-24T13:19:25.558" v="12567" actId="14826"/>
           <ac:picMkLst>
             <pc:docMk/>
             <pc:sldMk cId="440999752" sldId="279"/>
@@ -242,7 +242,7 @@
         </pc:picChg>
       </pc:sldChg>
       <pc:sldChg chg="modSp mod">
-        <pc:chgData name="Andrea Esposito" userId="af663d4e0f6c8da9" providerId="LiveId" clId="{262502FB-FC54-43DB-AB78-73175A28E98A}" dt="2026-04-22T10:45:24.629" v="11220" actId="14826"/>
+        <pc:chgData name="Andrea Esposito" userId="af663d4e0f6c8da9" providerId="LiveId" clId="{262502FB-FC54-43DB-AB78-73175A28E98A}" dt="2026-04-24T13:19:05.042" v="12566" actId="1035"/>
         <pc:sldMkLst>
           <pc:docMk/>
           <pc:sldMk cId="1110123291" sldId="280"/>
@@ -256,7 +256,7 @@
           </ac:spMkLst>
         </pc:spChg>
         <pc:picChg chg="mod">
-          <ac:chgData name="Andrea Esposito" userId="af663d4e0f6c8da9" providerId="LiveId" clId="{262502FB-FC54-43DB-AB78-73175A28E98A}" dt="2026-04-22T10:45:24.629" v="11220" actId="14826"/>
+          <ac:chgData name="Andrea Esposito" userId="af663d4e0f6c8da9" providerId="LiveId" clId="{262502FB-FC54-43DB-AB78-73175A28E98A}" dt="2026-04-24T13:19:05.042" v="12566" actId="1035"/>
           <ac:picMkLst>
             <pc:docMk/>
             <pc:sldMk cId="1110123291" sldId="280"/>
@@ -309,22 +309,6 @@
             <ac:spMk id="3" creationId="{9730B24D-B359-8564-AB53-48523D1FE038}"/>
           </ac:spMkLst>
         </pc:spChg>
-        <pc:spChg chg="add del">
-          <ac:chgData name="Andrea Esposito" userId="af663d4e0f6c8da9" providerId="LiveId" clId="{262502FB-FC54-43DB-AB78-73175A28E98A}" dt="2026-04-22T13:50:49.706" v="12269" actId="22"/>
-          <ac:spMkLst>
-            <pc:docMk/>
-            <pc:sldMk cId="1134298706" sldId="282"/>
-            <ac:spMk id="6" creationId="{AAAD07E0-6793-1B58-AEB7-4FA7363EB0CD}"/>
-          </ac:spMkLst>
-        </pc:spChg>
-        <pc:spChg chg="add del">
-          <ac:chgData name="Andrea Esposito" userId="af663d4e0f6c8da9" providerId="LiveId" clId="{262502FB-FC54-43DB-AB78-73175A28E98A}" dt="2026-04-22T13:50:52.364" v="12271" actId="22"/>
-          <ac:spMkLst>
-            <pc:docMk/>
-            <pc:sldMk cId="1134298706" sldId="282"/>
-            <ac:spMk id="8" creationId="{19250BBD-7F5A-AAF4-7991-8060F8A3D541}"/>
-          </ac:spMkLst>
-        </pc:spChg>
         <pc:picChg chg="mod modCrop">
           <ac:chgData name="Andrea Esposito" userId="af663d4e0f6c8da9" providerId="LiveId" clId="{262502FB-FC54-43DB-AB78-73175A28E98A}" dt="2026-04-22T10:45:40.021" v="11221" actId="14826"/>
           <ac:picMkLst>
@@ -363,13 +347,6 @@
             <ac:picMk id="10" creationId="{08A9A256-706C-A8C7-C2E2-0279C8FE242F}"/>
           </ac:picMkLst>
         </pc:picChg>
-      </pc:sldChg>
-      <pc:sldChg chg="modSp add del mod">
-        <pc:chgData name="Andrea Esposito" userId="af663d4e0f6c8da9" providerId="LiveId" clId="{262502FB-FC54-43DB-AB78-73175A28E98A}" dt="2026-04-22T10:43:48.806" v="11195" actId="47"/>
-        <pc:sldMkLst>
-          <pc:docMk/>
-          <pc:sldMk cId="3973902408" sldId="293"/>
-        </pc:sldMkLst>
       </pc:sldChg>
       <pc:sldChg chg="modSp add mod">
         <pc:chgData name="Andrea Esposito" userId="af663d4e0f6c8da9" providerId="LiveId" clId="{262502FB-FC54-43DB-AB78-73175A28E98A}" dt="2026-04-22T11:03:39.549" v="11450"/>
@@ -608,22 +585,6 @@
             <ac:spMk id="2" creationId="{FA845D0E-134A-5B56-94C1-A0348BBFF71D}"/>
           </ac:spMkLst>
         </pc:spChg>
-        <pc:spChg chg="del">
-          <ac:chgData name="Andrea Esposito" userId="af663d4e0f6c8da9" providerId="LiveId" clId="{262502FB-FC54-43DB-AB78-73175A28E98A}" dt="2026-04-22T11:08:36.073" v="11452" actId="22"/>
-          <ac:spMkLst>
-            <pc:docMk/>
-            <pc:sldMk cId="2601912489" sldId="303"/>
-            <ac:spMk id="3" creationId="{F47FAFA6-1383-9428-7BDE-1108E21953B2}"/>
-          </ac:spMkLst>
-        </pc:spChg>
-        <pc:spChg chg="add del mod">
-          <ac:chgData name="Andrea Esposito" userId="af663d4e0f6c8da9" providerId="LiveId" clId="{262502FB-FC54-43DB-AB78-73175A28E98A}" dt="2026-04-22T11:09:54.590" v="11483"/>
-          <ac:spMkLst>
-            <pc:docMk/>
-            <pc:sldMk cId="2601912489" sldId="303"/>
-            <ac:spMk id="8" creationId="{8ABE09F5-2AC4-EE25-D659-FB461CB88FD2}"/>
-          </ac:spMkLst>
-        </pc:spChg>
         <pc:spChg chg="add mod">
           <ac:chgData name="Andrea Esposito" userId="af663d4e0f6c8da9" providerId="LiveId" clId="{262502FB-FC54-43DB-AB78-73175A28E98A}" dt="2026-04-22T11:12:10.342" v="11534" actId="1076"/>
           <ac:spMkLst>
@@ -664,37 +625,6 @@
             <ac:picMk id="7" creationId="{3E7AA099-5DAE-6020-B35F-24B9BAEE7D5C}"/>
           </ac:picMkLst>
         </pc:picChg>
-        <pc:picChg chg="add del">
-          <ac:chgData name="Andrea Esposito" userId="af663d4e0f6c8da9" providerId="LiveId" clId="{262502FB-FC54-43DB-AB78-73175A28E98A}" dt="2026-04-22T11:09:56.615" v="11485" actId="22"/>
-          <ac:picMkLst>
-            <pc:docMk/>
-            <pc:sldMk cId="2601912489" sldId="303"/>
-            <ac:picMk id="10" creationId="{EB2E5427-2449-6320-6D12-E9D667B2E5AF}"/>
-          </ac:picMkLst>
-        </pc:picChg>
-        <pc:picChg chg="add del">
-          <ac:chgData name="Andrea Esposito" userId="af663d4e0f6c8da9" providerId="LiveId" clId="{262502FB-FC54-43DB-AB78-73175A28E98A}" dt="2026-04-22T11:10:19.104" v="11504" actId="22"/>
-          <ac:picMkLst>
-            <pc:docMk/>
-            <pc:sldMk cId="2601912489" sldId="303"/>
-            <ac:picMk id="13" creationId="{B0B9C7CA-E5D9-541D-B4F0-4149AA60ADCC}"/>
-          </ac:picMkLst>
-        </pc:picChg>
-        <pc:picChg chg="add del">
-          <ac:chgData name="Andrea Esposito" userId="af663d4e0f6c8da9" providerId="LiveId" clId="{262502FB-FC54-43DB-AB78-73175A28E98A}" dt="2026-04-22T11:10:24.067" v="11506" actId="478"/>
-          <ac:picMkLst>
-            <pc:docMk/>
-            <pc:sldMk cId="2601912489" sldId="303"/>
-            <ac:picMk id="15" creationId="{E33F9D1F-4C83-DB29-AA5D-B0663037A334}"/>
-          </ac:picMkLst>
-        </pc:picChg>
-      </pc:sldChg>
-      <pc:sldChg chg="new del">
-        <pc:chgData name="Andrea Esposito" userId="af663d4e0f6c8da9" providerId="LiveId" clId="{262502FB-FC54-43DB-AB78-73175A28E98A}" dt="2026-04-22T11:17:44.280" v="11579" actId="47"/>
-        <pc:sldMkLst>
-          <pc:docMk/>
-          <pc:sldMk cId="267756320" sldId="304"/>
-        </pc:sldMkLst>
       </pc:sldChg>
       <pc:sldChg chg="addSp delSp modSp add mod">
         <pc:chgData name="Andrea Esposito" userId="af663d4e0f6c8da9" providerId="LiveId" clId="{262502FB-FC54-43DB-AB78-73175A28E98A}" dt="2026-04-22T11:25:16.873" v="11607" actId="1076"/>
@@ -708,14 +638,6 @@
             <pc:docMk/>
             <pc:sldMk cId="2125049322" sldId="305"/>
             <ac:spMk id="2" creationId="{E93F75F6-698F-22A0-BCE2-128112BE2555}"/>
-          </ac:spMkLst>
-        </pc:spChg>
-        <pc:spChg chg="add del mod">
-          <ac:chgData name="Andrea Esposito" userId="af663d4e0f6c8da9" providerId="LiveId" clId="{262502FB-FC54-43DB-AB78-73175A28E98A}" dt="2026-04-22T11:23:54.191" v="11598" actId="478"/>
-          <ac:spMkLst>
-            <pc:docMk/>
-            <pc:sldMk cId="2125049322" sldId="305"/>
-            <ac:spMk id="4" creationId="{5913BA4B-A9E7-D1AD-4613-12F33C8C3D61}"/>
           </ac:spMkLst>
         </pc:spChg>
         <pc:spChg chg="mod">
@@ -742,22 +664,6 @@
             <ac:spMk id="17" creationId="{B8694250-221C-212D-367B-A9E99B593C16}"/>
           </ac:spMkLst>
         </pc:spChg>
-        <pc:picChg chg="del mod">
-          <ac:chgData name="Andrea Esposito" userId="af663d4e0f6c8da9" providerId="LiveId" clId="{262502FB-FC54-43DB-AB78-73175A28E98A}" dt="2026-04-22T11:23:29.036" v="11593" actId="478"/>
-          <ac:picMkLst>
-            <pc:docMk/>
-            <pc:sldMk cId="2125049322" sldId="305"/>
-            <ac:picMk id="5" creationId="{E8AD7FCE-4C89-A814-8642-60076FEC08F5}"/>
-          </ac:picMkLst>
-        </pc:picChg>
-        <pc:picChg chg="del mod">
-          <ac:chgData name="Andrea Esposito" userId="af663d4e0f6c8da9" providerId="LiveId" clId="{262502FB-FC54-43DB-AB78-73175A28E98A}" dt="2026-04-22T11:24:49.636" v="11600" actId="478"/>
-          <ac:picMkLst>
-            <pc:docMk/>
-            <pc:sldMk cId="2125049322" sldId="305"/>
-            <ac:picMk id="7" creationId="{83292C28-94E0-C408-C9C4-7DBF445E7AE2}"/>
-          </ac:picMkLst>
-        </pc:picChg>
         <pc:picChg chg="add mod">
           <ac:chgData name="Andrea Esposito" userId="af663d4e0f6c8da9" providerId="LiveId" clId="{262502FB-FC54-43DB-AB78-73175A28E98A}" dt="2026-04-22T11:25:11.156" v="11606" actId="1076"/>
           <ac:picMkLst>
@@ -813,14 +719,6 @@
             <ac:spMk id="17" creationId="{F222B841-9F34-748F-00AD-BB138D40CB3E}"/>
           </ac:spMkLst>
         </pc:spChg>
-        <pc:picChg chg="add del mod">
-          <ac:chgData name="Andrea Esposito" userId="af663d4e0f6c8da9" providerId="LiveId" clId="{262502FB-FC54-43DB-AB78-73175A28E98A}" dt="2026-04-22T13:04:40.471" v="11968" actId="478"/>
-          <ac:picMkLst>
-            <pc:docMk/>
-            <pc:sldMk cId="1140064749" sldId="306"/>
-            <ac:picMk id="4" creationId="{38169467-548E-1DBA-A51E-6B6E4727A801}"/>
-          </ac:picMkLst>
-        </pc:picChg>
         <pc:picChg chg="add mod">
           <ac:chgData name="Andrea Esposito" userId="af663d4e0f6c8da9" providerId="LiveId" clId="{262502FB-FC54-43DB-AB78-73175A28E98A}" dt="2026-04-22T13:06:18.943" v="11976" actId="1076"/>
           <ac:picMkLst>
@@ -829,36 +727,12 @@
             <ac:picMk id="5" creationId="{AAFDB692-9774-44E0-5AEE-8799BA4CBBE3}"/>
           </ac:picMkLst>
         </pc:picChg>
-        <pc:picChg chg="add del mod">
-          <ac:chgData name="Andrea Esposito" userId="af663d4e0f6c8da9" providerId="LiveId" clId="{262502FB-FC54-43DB-AB78-73175A28E98A}" dt="2026-04-22T13:04:45.569" v="11971" actId="478"/>
-          <ac:picMkLst>
-            <pc:docMk/>
-            <pc:sldMk cId="1140064749" sldId="306"/>
-            <ac:picMk id="6" creationId="{249954EC-432B-1BB2-565C-2796446FC98A}"/>
-          </ac:picMkLst>
-        </pc:picChg>
         <pc:picChg chg="add mod">
           <ac:chgData name="Andrea Esposito" userId="af663d4e0f6c8da9" providerId="LiveId" clId="{262502FB-FC54-43DB-AB78-73175A28E98A}" dt="2026-04-22T13:06:18.943" v="11976" actId="1076"/>
           <ac:picMkLst>
             <pc:docMk/>
             <pc:sldMk cId="1140064749" sldId="306"/>
             <ac:picMk id="8" creationId="{789C3771-8AAC-8E32-26A3-74CB8BBB09CD}"/>
-          </ac:picMkLst>
-        </pc:picChg>
-        <pc:picChg chg="del mod">
-          <ac:chgData name="Andrea Esposito" userId="af663d4e0f6c8da9" providerId="LiveId" clId="{262502FB-FC54-43DB-AB78-73175A28E98A}" dt="2026-04-22T11:38:17.743" v="11681" actId="478"/>
-          <ac:picMkLst>
-            <pc:docMk/>
-            <pc:sldMk cId="1140064749" sldId="306"/>
-            <ac:picMk id="8" creationId="{9EC08B0C-5FE2-685C-B0C7-5F2A662098C9}"/>
-          </ac:picMkLst>
-        </pc:picChg>
-        <pc:picChg chg="del mod">
-          <ac:chgData name="Andrea Esposito" userId="af663d4e0f6c8da9" providerId="LiveId" clId="{262502FB-FC54-43DB-AB78-73175A28E98A}" dt="2026-04-22T11:40:38.674" v="11691" actId="478"/>
-          <ac:picMkLst>
-            <pc:docMk/>
-            <pc:sldMk cId="1140064749" sldId="306"/>
-            <ac:picMk id="10" creationId="{B8E070F0-D705-9045-5826-BBC0F97BA9D4}"/>
           </ac:picMkLst>
         </pc:picChg>
       </pc:sldChg>
@@ -885,13 +759,6 @@
           </ac:spMkLst>
         </pc:spChg>
       </pc:sldChg>
-      <pc:sldChg chg="new del">
-        <pc:chgData name="Andrea Esposito" userId="af663d4e0f6c8da9" providerId="LiveId" clId="{262502FB-FC54-43DB-AB78-73175A28E98A}" dt="2026-04-22T13:00:03.096" v="11741" actId="47"/>
-        <pc:sldMkLst>
-          <pc:docMk/>
-          <pc:sldMk cId="3735497022" sldId="307"/>
-        </pc:sldMkLst>
-      </pc:sldChg>
       <pc:sldChg chg="addSp delSp modSp new mod">
         <pc:chgData name="Andrea Esposito" userId="af663d4e0f6c8da9" providerId="LiveId" clId="{262502FB-FC54-43DB-AB78-73175A28E98A}" dt="2026-04-22T14:09:41.579" v="12564" actId="20577"/>
         <pc:sldMkLst>
@@ -912,14 +779,6 @@
             <pc:docMk/>
             <pc:sldMk cId="3559349616" sldId="308"/>
             <ac:spMk id="3" creationId="{7B1E2BBC-2608-2BA0-D32F-6239FFC6D173}"/>
-          </ac:spMkLst>
-        </pc:spChg>
-        <pc:spChg chg="add mod">
-          <ac:chgData name="Andrea Esposito" userId="af663d4e0f6c8da9" providerId="LiveId" clId="{262502FB-FC54-43DB-AB78-73175A28E98A}" dt="2026-04-22T13:46:46.465" v="12165"/>
-          <ac:spMkLst>
-            <pc:docMk/>
-            <pc:sldMk cId="3559349616" sldId="308"/>
-            <ac:spMk id="4" creationId="{D01AA98B-7C86-B510-A490-3D621BADAE17}"/>
           </ac:spMkLst>
         </pc:spChg>
       </pc:sldChg>
@@ -1056,7 +915,7 @@
           <a:p>
             <a:fld id="{AAAB00D7-A12E-4179-B4FE-A225F398F237}" type="datetimeFigureOut">
               <a:rPr lang="it-IT" smtClean="0"/>
-              <a:t>22/04/2026</a:t>
+              <a:t>24/04/2026</a:t>
             </a:fld>
             <a:endParaRPr lang="it-IT"/>
           </a:p>
@@ -1506,7 +1365,7 @@
           <a:p>
             <a:fld id="{A1E45834-53BD-4C8F-B791-CD5378F4150E}" type="datetimeFigureOut">
               <a:rPr lang="en-US" smtClean="0"/>
-              <a:t>4/22/2026</a:t>
+              <a:t>4/24/2026</a:t>
             </a:fld>
             <a:endParaRPr lang="en-US"/>
           </a:p>
@@ -1784,7 +1643,7 @@
           <a:p>
             <a:fld id="{A1E45834-53BD-4C8F-B791-CD5378F4150E}" type="datetimeFigureOut">
               <a:rPr lang="en-US" smtClean="0"/>
-              <a:t>4/22/2026</a:t>
+              <a:t>4/24/2026</a:t>
             </a:fld>
             <a:endParaRPr lang="en-US"/>
           </a:p>
@@ -1981,7 +1840,7 @@
           <a:p>
             <a:fld id="{A1E45834-53BD-4C8F-B791-CD5378F4150E}" type="datetimeFigureOut">
               <a:rPr lang="en-US" smtClean="0"/>
-              <a:t>4/22/2026</a:t>
+              <a:t>4/24/2026</a:t>
             </a:fld>
             <a:endParaRPr lang="en-US"/>
           </a:p>
@@ -2252,7 +2111,7 @@
           <a:p>
             <a:fld id="{A1E45834-53BD-4C8F-B791-CD5378F4150E}" type="datetimeFigureOut">
               <a:rPr lang="en-US" smtClean="0"/>
-              <a:t>4/22/2026</a:t>
+              <a:t>4/24/2026</a:t>
             </a:fld>
             <a:endParaRPr lang="en-US"/>
           </a:p>
@@ -2587,7 +2446,7 @@
           <a:p>
             <a:fld id="{A1E45834-53BD-4C8F-B791-CD5378F4150E}" type="datetimeFigureOut">
               <a:rPr lang="en-US" smtClean="0"/>
-              <a:t>4/22/2026</a:t>
+              <a:t>4/24/2026</a:t>
             </a:fld>
             <a:endParaRPr lang="en-US"/>
           </a:p>
@@ -3200,7 +3059,7 @@
           <a:p>
             <a:fld id="{A1E45834-53BD-4C8F-B791-CD5378F4150E}" type="datetimeFigureOut">
               <a:rPr lang="en-US" smtClean="0"/>
-              <a:t>4/22/2026</a:t>
+              <a:t>4/24/2026</a:t>
             </a:fld>
             <a:endParaRPr lang="en-US"/>
           </a:p>
@@ -4050,7 +3909,7 @@
           <a:p>
             <a:fld id="{A1E45834-53BD-4C8F-B791-CD5378F4150E}" type="datetimeFigureOut">
               <a:rPr lang="en-US" smtClean="0"/>
-              <a:t>4/22/2026</a:t>
+              <a:t>4/24/2026</a:t>
             </a:fld>
             <a:endParaRPr lang="en-US"/>
           </a:p>
@@ -4223,7 +4082,7 @@
           <a:p>
             <a:fld id="{A1E45834-53BD-4C8F-B791-CD5378F4150E}" type="datetimeFigureOut">
               <a:rPr lang="en-US" smtClean="0"/>
-              <a:t>4/22/2026</a:t>
+              <a:t>4/24/2026</a:t>
             </a:fld>
             <a:endParaRPr lang="en-US"/>
           </a:p>
@@ -4406,7 +4265,7 @@
           <a:p>
             <a:fld id="{A1E45834-53BD-4C8F-B791-CD5378F4150E}" type="datetimeFigureOut">
               <a:rPr lang="en-US" smtClean="0"/>
-              <a:t>4/22/2026</a:t>
+              <a:t>4/24/2026</a:t>
             </a:fld>
             <a:endParaRPr lang="en-US"/>
           </a:p>
@@ -5601,7 +5460,7 @@
           <a:p>
             <a:fld id="{A1E45834-53BD-4C8F-B791-CD5378F4150E}" type="datetimeFigureOut">
               <a:rPr lang="en-US" smtClean="0"/>
-              <a:t>4/22/2026</a:t>
+              <a:t>4/24/2026</a:t>
             </a:fld>
             <a:endParaRPr lang="en-US"/>
           </a:p>
@@ -5848,7 +5707,7 @@
           <a:p>
             <a:fld id="{A1E45834-53BD-4C8F-B791-CD5378F4150E}" type="datetimeFigureOut">
               <a:rPr lang="en-US" smtClean="0"/>
-              <a:t>4/22/2026</a:t>
+              <a:t>4/24/2026</a:t>
             </a:fld>
             <a:endParaRPr lang="en-US"/>
           </a:p>
@@ -6143,7 +6002,7 @@
           <a:p>
             <a:fld id="{A1E45834-53BD-4C8F-B791-CD5378F4150E}" type="datetimeFigureOut">
               <a:rPr lang="en-US" smtClean="0"/>
-              <a:t>4/22/2026</a:t>
+              <a:t>4/24/2026</a:t>
             </a:fld>
             <a:endParaRPr lang="en-US"/>
           </a:p>
@@ -6584,7 +6443,7 @@
           <a:p>
             <a:fld id="{A1E45834-53BD-4C8F-B791-CD5378F4150E}" type="datetimeFigureOut">
               <a:rPr lang="en-US" smtClean="0"/>
-              <a:t>4/22/2026</a:t>
+              <a:t>4/24/2026</a:t>
             </a:fld>
             <a:endParaRPr lang="en-US"/>
           </a:p>
@@ -6705,7 +6564,7 @@
           <a:p>
             <a:fld id="{A1E45834-53BD-4C8F-B791-CD5378F4150E}" type="datetimeFigureOut">
               <a:rPr lang="en-US" smtClean="0"/>
-              <a:t>4/22/2026</a:t>
+              <a:t>4/24/2026</a:t>
             </a:fld>
             <a:endParaRPr lang="en-US"/>
           </a:p>
@@ -6803,7 +6662,7 @@
           <a:p>
             <a:fld id="{A1E45834-53BD-4C8F-B791-CD5378F4150E}" type="datetimeFigureOut">
               <a:rPr lang="en-US" smtClean="0"/>
-              <a:t>4/22/2026</a:t>
+              <a:t>4/24/2026</a:t>
             </a:fld>
             <a:endParaRPr lang="en-US"/>
           </a:p>
@@ -7085,7 +6944,7 @@
           <a:p>
             <a:fld id="{A1E45834-53BD-4C8F-B791-CD5378F4150E}" type="datetimeFigureOut">
               <a:rPr lang="en-US" smtClean="0"/>
-              <a:t>4/22/2026</a:t>
+              <a:t>4/24/2026</a:t>
             </a:fld>
             <a:endParaRPr lang="en-US"/>
           </a:p>
@@ -7363,7 +7222,7 @@
           <a:p>
             <a:fld id="{A1E45834-53BD-4C8F-B791-CD5378F4150E}" type="datetimeFigureOut">
               <a:rPr lang="en-US" smtClean="0"/>
-              <a:t>4/22/2026</a:t>
+              <a:t>4/24/2026</a:t>
             </a:fld>
             <a:endParaRPr lang="en-US"/>
           </a:p>
@@ -7809,7 +7668,7 @@
           <a:p>
             <a:fld id="{A1E45834-53BD-4C8F-B791-CD5378F4150E}" type="datetimeFigureOut">
               <a:rPr lang="en-US" smtClean="0"/>
-              <a:t>4/22/2026</a:t>
+              <a:t>4/24/2026</a:t>
             </a:fld>
             <a:endParaRPr lang="en-US"/>
           </a:p>
@@ -14455,8 +14314,8 @@
         </p:blipFill>
         <p:spPr>
           <a:xfrm>
-            <a:off x="5048455" y="1785046"/>
-            <a:ext cx="6495836" cy="3897502"/>
+            <a:off x="5048455" y="1775214"/>
+            <a:ext cx="6495836" cy="3897501"/>
           </a:xfrm>
           <a:prstGeom prst="rect">
             <a:avLst/>
